--- a/stats_case_study/case_studies/23_bootstrap_credit_limit_spend/presentation/case_study_presentation.pptx
+++ b/stats_case_study/case_studies/23_bootstrap_credit_limit_spend/presentation/case_study_presentation.pptx
@@ -4764,8 +4764,8 @@
         </p:blipFill>
         <p:spPr>
           <a:xfrm>
-            <a:off x="548640" y="1973122"/>
-            <a:ext cx="11094415" cy="2957476"/>
+            <a:off x="548640" y="1968467"/>
+            <a:ext cx="11094415" cy="2966786"/>
           </a:xfrm>
           <a:prstGeom prst="rect">
             <a:avLst/>
@@ -5874,8 +5874,8 @@
         </p:blipFill>
         <p:spPr>
           <a:xfrm>
-            <a:off x="548640" y="2004155"/>
-            <a:ext cx="11094415" cy="2895409"/>
+            <a:off x="548640" y="1999500"/>
+            <a:ext cx="11094415" cy="2904719"/>
           </a:xfrm>
           <a:prstGeom prst="rect">
             <a:avLst/>
@@ -6024,7 +6024,7 @@
                 </a:solidFill>
                 <a:latin typeface="Calibri"/>
               </a:rPr>
-              <a:t>The 60 vs 60 pilot overstates every effect and its intervals are very wide</a:t>
+              <a:t>The 60 vs 60 pilot overstates most effects and its intervals are very wide</a:t>
             </a:r>
           </a:p>
         </p:txBody>
@@ -6157,8 +6157,8 @@
         </p:blipFill>
         <p:spPr>
           <a:xfrm>
-            <a:off x="1488439" y="1554480"/>
-            <a:ext cx="9214816" cy="3794760"/>
+            <a:off x="1472781" y="1554480"/>
+            <a:ext cx="9246133" cy="3794760"/>
           </a:xfrm>
           <a:prstGeom prst="rect">
             <a:avLst/>
@@ -6440,8 +6440,8 @@
         </p:blipFill>
         <p:spPr>
           <a:xfrm>
-            <a:off x="1457807" y="1554480"/>
-            <a:ext cx="9276080" cy="3794760"/>
+            <a:off x="1478760" y="1554480"/>
+            <a:ext cx="9234175" cy="3794760"/>
           </a:xfrm>
           <a:prstGeom prst="rect">
             <a:avLst/>
@@ -7193,7 +7193,7 @@
                 </a:solidFill>
                 <a:latin typeface="Calibri"/>
               </a:rPr>
-              <a:t>The interval runs from −219 to +1,101 per customer, so a loss cannot be ruled out.</a:t>
+              <a:t>The interval runs from −₹219 to +₹1,101 per customer, so a loss cannot be ruled out.</a:t>
             </a:r>
           </a:p>
           <a:p>
